--- a/image-sources/streams.pptx
+++ b/image-sources/streams.pptx
@@ -7,6 +7,7 @@
   <p:sldIdLst>
     <p:sldId id="256" r:id="rId2"/>
     <p:sldId id="257" r:id="rId3"/>
+    <p:sldId id="258" r:id="rId4"/>
   </p:sldIdLst>
   <p:sldSz cx="12192000" cy="6858000"/>
   <p:notesSz cx="6858000" cy="9144000"/>
@@ -105,6 +106,11 @@
       </a:defRPr>
     </a:lvl9pPr>
   </p:defaultTextStyle>
+  <p:extLst>
+    <p:ext uri="{EFAFB233-063F-42B5-8137-9DF3F51BA10A}">
+      <p15:sldGuideLst xmlns:p15="http://schemas.microsoft.com/office/powerpoint/2012/main"/>
+    </p:ext>
+  </p:extLst>
 </p:presentation>
 </file>
 
@@ -257,7 +263,7 @@
           <a:p>
             <a:fld id="{D9AB3009-9438-1143-8AD4-7386E70F8050}" type="datetimeFigureOut">
               <a:rPr lang="en-BE" smtClean="0"/>
-              <a:t>10/04/2024</a:t>
+              <a:t>19/03/2026</a:t>
             </a:fld>
             <a:endParaRPr lang="en-BE"/>
           </a:p>
@@ -457,7 +463,7 @@
           <a:p>
             <a:fld id="{D9AB3009-9438-1143-8AD4-7386E70F8050}" type="datetimeFigureOut">
               <a:rPr lang="en-BE" smtClean="0"/>
-              <a:t>10/04/2024</a:t>
+              <a:t>19/03/2026</a:t>
             </a:fld>
             <a:endParaRPr lang="en-BE"/>
           </a:p>
@@ -667,7 +673,7 @@
           <a:p>
             <a:fld id="{D9AB3009-9438-1143-8AD4-7386E70F8050}" type="datetimeFigureOut">
               <a:rPr lang="en-BE" smtClean="0"/>
-              <a:t>10/04/2024</a:t>
+              <a:t>19/03/2026</a:t>
             </a:fld>
             <a:endParaRPr lang="en-BE"/>
           </a:p>
@@ -867,7 +873,7 @@
           <a:p>
             <a:fld id="{D9AB3009-9438-1143-8AD4-7386E70F8050}" type="datetimeFigureOut">
               <a:rPr lang="en-BE" smtClean="0"/>
-              <a:t>10/04/2024</a:t>
+              <a:t>19/03/2026</a:t>
             </a:fld>
             <a:endParaRPr lang="en-BE"/>
           </a:p>
@@ -1143,7 +1149,7 @@
           <a:p>
             <a:fld id="{D9AB3009-9438-1143-8AD4-7386E70F8050}" type="datetimeFigureOut">
               <a:rPr lang="en-BE" smtClean="0"/>
-              <a:t>10/04/2024</a:t>
+              <a:t>19/03/2026</a:t>
             </a:fld>
             <a:endParaRPr lang="en-BE"/>
           </a:p>
@@ -1411,7 +1417,7 @@
           <a:p>
             <a:fld id="{D9AB3009-9438-1143-8AD4-7386E70F8050}" type="datetimeFigureOut">
               <a:rPr lang="en-BE" smtClean="0"/>
-              <a:t>10/04/2024</a:t>
+              <a:t>19/03/2026</a:t>
             </a:fld>
             <a:endParaRPr lang="en-BE"/>
           </a:p>
@@ -1826,7 +1832,7 @@
           <a:p>
             <a:fld id="{D9AB3009-9438-1143-8AD4-7386E70F8050}" type="datetimeFigureOut">
               <a:rPr lang="en-BE" smtClean="0"/>
-              <a:t>10/04/2024</a:t>
+              <a:t>19/03/2026</a:t>
             </a:fld>
             <a:endParaRPr lang="en-BE"/>
           </a:p>
@@ -1968,7 +1974,7 @@
           <a:p>
             <a:fld id="{D9AB3009-9438-1143-8AD4-7386E70F8050}" type="datetimeFigureOut">
               <a:rPr lang="en-BE" smtClean="0"/>
-              <a:t>10/04/2024</a:t>
+              <a:t>19/03/2026</a:t>
             </a:fld>
             <a:endParaRPr lang="en-BE"/>
           </a:p>
@@ -2081,7 +2087,7 @@
           <a:p>
             <a:fld id="{D9AB3009-9438-1143-8AD4-7386E70F8050}" type="datetimeFigureOut">
               <a:rPr lang="en-BE" smtClean="0"/>
-              <a:t>10/04/2024</a:t>
+              <a:t>19/03/2026</a:t>
             </a:fld>
             <a:endParaRPr lang="en-BE"/>
           </a:p>
@@ -2394,7 +2400,7 @@
           <a:p>
             <a:fld id="{D9AB3009-9438-1143-8AD4-7386E70F8050}" type="datetimeFigureOut">
               <a:rPr lang="en-BE" smtClean="0"/>
-              <a:t>10/04/2024</a:t>
+              <a:t>19/03/2026</a:t>
             </a:fld>
             <a:endParaRPr lang="en-BE"/>
           </a:p>
@@ -2683,7 +2689,7 @@
           <a:p>
             <a:fld id="{D9AB3009-9438-1143-8AD4-7386E70F8050}" type="datetimeFigureOut">
               <a:rPr lang="en-BE" smtClean="0"/>
-              <a:t>10/04/2024</a:t>
+              <a:t>19/03/2026</a:t>
             </a:fld>
             <a:endParaRPr lang="en-BE"/>
           </a:p>
@@ -2926,7 +2932,7 @@
           <a:p>
             <a:fld id="{D9AB3009-9438-1143-8AD4-7386E70F8050}" type="datetimeFigureOut">
               <a:rPr lang="en-BE" smtClean="0"/>
-              <a:t>10/04/2024</a:t>
+              <a:t>19/03/2026</a:t>
             </a:fld>
             <a:endParaRPr lang="en-BE"/>
           </a:p>
@@ -6103,6 +6109,2335 @@
     <p:extLst>
       <p:ext uri="{BB962C8B-B14F-4D97-AF65-F5344CB8AC3E}">
         <p14:creationId xmlns:p14="http://schemas.microsoft.com/office/powerpoint/2010/main" val="659935068"/>
+      </p:ext>
+    </p:extLst>
+  </p:cSld>
+  <p:clrMapOvr>
+    <a:masterClrMapping/>
+  </p:clrMapOvr>
+</p:sld>
+</file>
+
+<file path=ppt/slides/slide3.xml><?xml version="1.0" encoding="utf-8"?>
+<p:sld xmlns:a="http://schemas.openxmlformats.org/drawingml/2006/main" xmlns:r="http://schemas.openxmlformats.org/officeDocument/2006/relationships" xmlns:p="http://schemas.openxmlformats.org/presentationml/2006/main">
+  <p:cSld>
+    <p:spTree>
+      <p:nvGrpSpPr>
+        <p:cNvPr id="1" name=""/>
+        <p:cNvGrpSpPr/>
+        <p:nvPr/>
+      </p:nvGrpSpPr>
+      <p:grpSpPr>
+        <a:xfrm>
+          <a:off x="0" y="0"/>
+          <a:ext cx="0" cy="0"/>
+          <a:chOff x="0" y="0"/>
+          <a:chExt cx="0" cy="0"/>
+        </a:xfrm>
+      </p:grpSpPr>
+      <p:sp>
+        <p:nvSpPr>
+          <p:cNvPr id="49" name="Rounded Rectangle 48">
+            <a:extLst>
+              <a:ext uri="{FF2B5EF4-FFF2-40B4-BE49-F238E27FC236}">
+                <a16:creationId xmlns:a16="http://schemas.microsoft.com/office/drawing/2014/main" id="{476709D1-6CF6-ACB8-9BBE-C0F60D5B883D}"/>
+              </a:ext>
+            </a:extLst>
+          </p:cNvPr>
+          <p:cNvSpPr/>
+          <p:nvPr/>
+        </p:nvSpPr>
+        <p:spPr>
+          <a:xfrm>
+            <a:off x="6867188" y="2401814"/>
+            <a:ext cx="3279347" cy="1027186"/>
+          </a:xfrm>
+          <a:prstGeom prst="roundRect">
+            <a:avLst/>
+          </a:prstGeom>
+        </p:spPr>
+        <p:style>
+          <a:lnRef idx="2">
+            <a:schemeClr val="dk1"/>
+          </a:lnRef>
+          <a:fillRef idx="1">
+            <a:schemeClr val="lt1"/>
+          </a:fillRef>
+          <a:effectRef idx="0">
+            <a:schemeClr val="dk1"/>
+          </a:effectRef>
+          <a:fontRef idx="minor">
+            <a:schemeClr val="dk1"/>
+          </a:fontRef>
+        </p:style>
+        <p:txBody>
+          <a:bodyPr rtlCol="0" anchor="t"/>
+          <a:lstStyle/>
+          <a:p>
+            <a:r>
+              <a:rPr lang="en-BE" dirty="0"/>
+              <a:t>Stream&lt;Box&gt;</a:t>
+            </a:r>
+          </a:p>
+        </p:txBody>
+      </p:sp>
+      <p:sp>
+        <p:nvSpPr>
+          <p:cNvPr id="48" name="Rounded Rectangle 47">
+            <a:extLst>
+              <a:ext uri="{FF2B5EF4-FFF2-40B4-BE49-F238E27FC236}">
+                <a16:creationId xmlns:a16="http://schemas.microsoft.com/office/drawing/2014/main" id="{09911ACA-0BFF-961E-05CA-283A5A4469E9}"/>
+              </a:ext>
+            </a:extLst>
+          </p:cNvPr>
+          <p:cNvSpPr/>
+          <p:nvPr/>
+        </p:nvSpPr>
+        <p:spPr>
+          <a:xfrm>
+            <a:off x="3719109" y="2401814"/>
+            <a:ext cx="2850619" cy="1027186"/>
+          </a:xfrm>
+          <a:prstGeom prst="roundRect">
+            <a:avLst/>
+          </a:prstGeom>
+        </p:spPr>
+        <p:style>
+          <a:lnRef idx="2">
+            <a:schemeClr val="dk1"/>
+          </a:lnRef>
+          <a:fillRef idx="1">
+            <a:schemeClr val="lt1"/>
+          </a:fillRef>
+          <a:effectRef idx="0">
+            <a:schemeClr val="dk1"/>
+          </a:effectRef>
+          <a:fontRef idx="minor">
+            <a:schemeClr val="dk1"/>
+          </a:fontRef>
+        </p:style>
+        <p:txBody>
+          <a:bodyPr rtlCol="0" anchor="t"/>
+          <a:lstStyle/>
+          <a:p>
+            <a:r>
+              <a:rPr lang="en-BE" dirty="0"/>
+              <a:t>Stream&lt;Box&gt;</a:t>
+            </a:r>
+          </a:p>
+        </p:txBody>
+      </p:sp>
+      <p:sp>
+        <p:nvSpPr>
+          <p:cNvPr id="47" name="Rounded Rectangle 46">
+            <a:extLst>
+              <a:ext uri="{FF2B5EF4-FFF2-40B4-BE49-F238E27FC236}">
+                <a16:creationId xmlns:a16="http://schemas.microsoft.com/office/drawing/2014/main" id="{1551997D-305D-A32C-4CBF-CF63349BCD0A}"/>
+              </a:ext>
+            </a:extLst>
+          </p:cNvPr>
+          <p:cNvSpPr/>
+          <p:nvPr/>
+        </p:nvSpPr>
+        <p:spPr>
+          <a:xfrm>
+            <a:off x="870333" y="2401814"/>
+            <a:ext cx="2449417" cy="1027186"/>
+          </a:xfrm>
+          <a:prstGeom prst="roundRect">
+            <a:avLst/>
+          </a:prstGeom>
+        </p:spPr>
+        <p:style>
+          <a:lnRef idx="2">
+            <a:schemeClr val="dk1"/>
+          </a:lnRef>
+          <a:fillRef idx="1">
+            <a:schemeClr val="lt1"/>
+          </a:fillRef>
+          <a:effectRef idx="0">
+            <a:schemeClr val="dk1"/>
+          </a:effectRef>
+          <a:fontRef idx="minor">
+            <a:schemeClr val="dk1"/>
+          </a:fontRef>
+        </p:style>
+        <p:txBody>
+          <a:bodyPr rtlCol="0" anchor="t"/>
+          <a:lstStyle/>
+          <a:p>
+            <a:r>
+              <a:rPr lang="en-BE" dirty="0"/>
+              <a:t>Stream&lt;Box&gt;</a:t>
+            </a:r>
+          </a:p>
+        </p:txBody>
+      </p:sp>
+      <p:sp>
+        <p:nvSpPr>
+          <p:cNvPr id="46" name="Rounded Rectangle 45">
+            <a:extLst>
+              <a:ext uri="{FF2B5EF4-FFF2-40B4-BE49-F238E27FC236}">
+                <a16:creationId xmlns:a16="http://schemas.microsoft.com/office/drawing/2014/main" id="{243835AF-9992-9B58-EAA3-56216EAE5BAB}"/>
+              </a:ext>
+            </a:extLst>
+          </p:cNvPr>
+          <p:cNvSpPr/>
+          <p:nvPr/>
+        </p:nvSpPr>
+        <p:spPr>
+          <a:xfrm>
+            <a:off x="229518" y="646778"/>
+            <a:ext cx="8684969" cy="1027186"/>
+          </a:xfrm>
+          <a:prstGeom prst="roundRect">
+            <a:avLst/>
+          </a:prstGeom>
+        </p:spPr>
+        <p:style>
+          <a:lnRef idx="2">
+            <a:schemeClr val="dk1"/>
+          </a:lnRef>
+          <a:fillRef idx="1">
+            <a:schemeClr val="lt1"/>
+          </a:fillRef>
+          <a:effectRef idx="0">
+            <a:schemeClr val="dk1"/>
+          </a:effectRef>
+          <a:fontRef idx="minor">
+            <a:schemeClr val="dk1"/>
+          </a:fontRef>
+        </p:style>
+        <p:txBody>
+          <a:bodyPr rtlCol="0" anchor="t"/>
+          <a:lstStyle/>
+          <a:p>
+            <a:r>
+              <a:rPr lang="en-BE" dirty="0"/>
+              <a:t>Stream&lt;Box&gt;</a:t>
+            </a:r>
+          </a:p>
+        </p:txBody>
+      </p:sp>
+      <p:sp>
+        <p:nvSpPr>
+          <p:cNvPr id="42" name="Rounded Rectangle 41">
+            <a:extLst>
+              <a:ext uri="{FF2B5EF4-FFF2-40B4-BE49-F238E27FC236}">
+                <a16:creationId xmlns:a16="http://schemas.microsoft.com/office/drawing/2014/main" id="{C281845F-0556-A4B8-DC05-0895420CA488}"/>
+              </a:ext>
+            </a:extLst>
+          </p:cNvPr>
+          <p:cNvSpPr/>
+          <p:nvPr/>
+        </p:nvSpPr>
+        <p:spPr>
+          <a:xfrm>
+            <a:off x="218504" y="4085691"/>
+            <a:ext cx="8460951" cy="1143000"/>
+          </a:xfrm>
+          <a:prstGeom prst="roundRect">
+            <a:avLst/>
+          </a:prstGeom>
+        </p:spPr>
+        <p:style>
+          <a:lnRef idx="2">
+            <a:schemeClr val="dk1"/>
+          </a:lnRef>
+          <a:fillRef idx="1">
+            <a:schemeClr val="lt1"/>
+          </a:fillRef>
+          <a:effectRef idx="0">
+            <a:schemeClr val="dk1"/>
+          </a:effectRef>
+          <a:fontRef idx="minor">
+            <a:schemeClr val="dk1"/>
+          </a:fontRef>
+        </p:style>
+        <p:txBody>
+          <a:bodyPr rtlCol="0" anchor="b"/>
+          <a:lstStyle/>
+          <a:p>
+            <a:r>
+              <a:rPr lang="en-BE" dirty="0"/>
+              <a:t>Map&lt;Color, Integer&gt;</a:t>
+            </a:r>
+          </a:p>
+        </p:txBody>
+      </p:sp>
+      <p:sp>
+        <p:nvSpPr>
+          <p:cNvPr id="2" name="Rectangle 1">
+            <a:extLst>
+              <a:ext uri="{FF2B5EF4-FFF2-40B4-BE49-F238E27FC236}">
+                <a16:creationId xmlns:a16="http://schemas.microsoft.com/office/drawing/2014/main" id="{C1E19190-4137-9561-886B-7C27CBC32E69}"/>
+              </a:ext>
+            </a:extLst>
+          </p:cNvPr>
+          <p:cNvSpPr/>
+          <p:nvPr/>
+        </p:nvSpPr>
+        <p:spPr>
+          <a:xfrm>
+            <a:off x="1134737" y="1090670"/>
+            <a:ext cx="385591" cy="385591"/>
+          </a:xfrm>
+          <a:prstGeom prst="rect">
+            <a:avLst/>
+          </a:prstGeom>
+        </p:spPr>
+        <p:style>
+          <a:lnRef idx="2">
+            <a:schemeClr val="accent1">
+              <a:shade val="15000"/>
+            </a:schemeClr>
+          </a:lnRef>
+          <a:fillRef idx="1">
+            <a:schemeClr val="accent1"/>
+          </a:fillRef>
+          <a:effectRef idx="0">
+            <a:schemeClr val="accent1"/>
+          </a:effectRef>
+          <a:fontRef idx="minor">
+            <a:schemeClr val="lt1"/>
+          </a:fontRef>
+        </p:style>
+        <p:txBody>
+          <a:bodyPr rtlCol="0" anchor="ctr"/>
+          <a:lstStyle/>
+          <a:p>
+            <a:pPr algn="ctr"/>
+            <a:r>
+              <a:rPr lang="en-BE" dirty="0"/>
+              <a:t>b</a:t>
+            </a:r>
+          </a:p>
+        </p:txBody>
+      </p:sp>
+      <p:sp>
+        <p:nvSpPr>
+          <p:cNvPr id="3" name="Rectangle 2">
+            <a:extLst>
+              <a:ext uri="{FF2B5EF4-FFF2-40B4-BE49-F238E27FC236}">
+                <a16:creationId xmlns:a16="http://schemas.microsoft.com/office/drawing/2014/main" id="{1D1C644D-A6CC-4609-6B8A-108A104C243B}"/>
+              </a:ext>
+            </a:extLst>
+          </p:cNvPr>
+          <p:cNvSpPr/>
+          <p:nvPr/>
+        </p:nvSpPr>
+        <p:spPr>
+          <a:xfrm>
+            <a:off x="1639677" y="1090669"/>
+            <a:ext cx="385591" cy="385591"/>
+          </a:xfrm>
+          <a:prstGeom prst="rect">
+            <a:avLst/>
+          </a:prstGeom>
+        </p:spPr>
+        <p:style>
+          <a:lnRef idx="2">
+            <a:schemeClr val="accent2">
+              <a:shade val="15000"/>
+            </a:schemeClr>
+          </a:lnRef>
+          <a:fillRef idx="1">
+            <a:schemeClr val="accent2"/>
+          </a:fillRef>
+          <a:effectRef idx="0">
+            <a:schemeClr val="accent2"/>
+          </a:effectRef>
+          <a:fontRef idx="minor">
+            <a:schemeClr val="lt1"/>
+          </a:fontRef>
+        </p:style>
+        <p:txBody>
+          <a:bodyPr rtlCol="0" anchor="ctr"/>
+          <a:lstStyle/>
+          <a:p>
+            <a:pPr algn="ctr"/>
+            <a:r>
+              <a:rPr lang="en-BE" dirty="0"/>
+              <a:t>o</a:t>
+            </a:r>
+          </a:p>
+        </p:txBody>
+      </p:sp>
+      <p:sp>
+        <p:nvSpPr>
+          <p:cNvPr id="4" name="Rectangle 3">
+            <a:extLst>
+              <a:ext uri="{FF2B5EF4-FFF2-40B4-BE49-F238E27FC236}">
+                <a16:creationId xmlns:a16="http://schemas.microsoft.com/office/drawing/2014/main" id="{B705ABB1-442C-3325-8E1A-4865EC305B1C}"/>
+              </a:ext>
+            </a:extLst>
+          </p:cNvPr>
+          <p:cNvSpPr/>
+          <p:nvPr/>
+        </p:nvSpPr>
+        <p:spPr>
+          <a:xfrm>
+            <a:off x="2144617" y="1090668"/>
+            <a:ext cx="385591" cy="385591"/>
+          </a:xfrm>
+          <a:prstGeom prst="rect">
+            <a:avLst/>
+          </a:prstGeom>
+        </p:spPr>
+        <p:style>
+          <a:lnRef idx="2">
+            <a:schemeClr val="accent6">
+              <a:shade val="15000"/>
+            </a:schemeClr>
+          </a:lnRef>
+          <a:fillRef idx="1">
+            <a:schemeClr val="accent6"/>
+          </a:fillRef>
+          <a:effectRef idx="0">
+            <a:schemeClr val="accent6"/>
+          </a:effectRef>
+          <a:fontRef idx="minor">
+            <a:schemeClr val="lt1"/>
+          </a:fontRef>
+        </p:style>
+        <p:txBody>
+          <a:bodyPr rtlCol="0" anchor="ctr"/>
+          <a:lstStyle/>
+          <a:p>
+            <a:pPr algn="ctr"/>
+            <a:r>
+              <a:rPr lang="en-BE" dirty="0"/>
+              <a:t>g</a:t>
+            </a:r>
+          </a:p>
+        </p:txBody>
+      </p:sp>
+      <p:sp>
+        <p:nvSpPr>
+          <p:cNvPr id="5" name="Rectangle 4">
+            <a:extLst>
+              <a:ext uri="{FF2B5EF4-FFF2-40B4-BE49-F238E27FC236}">
+                <a16:creationId xmlns:a16="http://schemas.microsoft.com/office/drawing/2014/main" id="{01553E4D-817B-036C-60D6-547672201145}"/>
+              </a:ext>
+            </a:extLst>
+          </p:cNvPr>
+          <p:cNvSpPr/>
+          <p:nvPr/>
+        </p:nvSpPr>
+        <p:spPr>
+          <a:xfrm>
+            <a:off x="2649557" y="1090667"/>
+            <a:ext cx="385591" cy="385591"/>
+          </a:xfrm>
+          <a:prstGeom prst="rect">
+            <a:avLst/>
+          </a:prstGeom>
+        </p:spPr>
+        <p:style>
+          <a:lnRef idx="2">
+            <a:schemeClr val="accent2">
+              <a:shade val="15000"/>
+            </a:schemeClr>
+          </a:lnRef>
+          <a:fillRef idx="1">
+            <a:schemeClr val="accent2"/>
+          </a:fillRef>
+          <a:effectRef idx="0">
+            <a:schemeClr val="accent2"/>
+          </a:effectRef>
+          <a:fontRef idx="minor">
+            <a:schemeClr val="lt1"/>
+          </a:fontRef>
+        </p:style>
+        <p:txBody>
+          <a:bodyPr rtlCol="0" anchor="ctr"/>
+          <a:lstStyle/>
+          <a:p>
+            <a:pPr algn="ctr"/>
+            <a:r>
+              <a:rPr lang="en-BE" dirty="0"/>
+              <a:t>o</a:t>
+            </a:r>
+          </a:p>
+        </p:txBody>
+      </p:sp>
+      <p:sp>
+        <p:nvSpPr>
+          <p:cNvPr id="6" name="Rectangle 5">
+            <a:extLst>
+              <a:ext uri="{FF2B5EF4-FFF2-40B4-BE49-F238E27FC236}">
+                <a16:creationId xmlns:a16="http://schemas.microsoft.com/office/drawing/2014/main" id="{62DBD31C-E464-E529-E963-AB395B24FF46}"/>
+              </a:ext>
+            </a:extLst>
+          </p:cNvPr>
+          <p:cNvSpPr/>
+          <p:nvPr/>
+        </p:nvSpPr>
+        <p:spPr>
+          <a:xfrm>
+            <a:off x="3154497" y="1090666"/>
+            <a:ext cx="385591" cy="385591"/>
+          </a:xfrm>
+          <a:prstGeom prst="rect">
+            <a:avLst/>
+          </a:prstGeom>
+        </p:spPr>
+        <p:style>
+          <a:lnRef idx="2">
+            <a:schemeClr val="accent2">
+              <a:shade val="15000"/>
+            </a:schemeClr>
+          </a:lnRef>
+          <a:fillRef idx="1">
+            <a:schemeClr val="accent2"/>
+          </a:fillRef>
+          <a:effectRef idx="0">
+            <a:schemeClr val="accent2"/>
+          </a:effectRef>
+          <a:fontRef idx="minor">
+            <a:schemeClr val="lt1"/>
+          </a:fontRef>
+        </p:style>
+        <p:txBody>
+          <a:bodyPr rtlCol="0" anchor="ctr"/>
+          <a:lstStyle/>
+          <a:p>
+            <a:pPr algn="ctr"/>
+            <a:r>
+              <a:rPr lang="en-BE" dirty="0"/>
+              <a:t>o</a:t>
+            </a:r>
+          </a:p>
+        </p:txBody>
+      </p:sp>
+      <p:sp>
+        <p:nvSpPr>
+          <p:cNvPr id="7" name="Rectangle 6">
+            <a:extLst>
+              <a:ext uri="{FF2B5EF4-FFF2-40B4-BE49-F238E27FC236}">
+                <a16:creationId xmlns:a16="http://schemas.microsoft.com/office/drawing/2014/main" id="{99572F6E-3DB2-E913-5E7B-0B2500EE86D6}"/>
+              </a:ext>
+            </a:extLst>
+          </p:cNvPr>
+          <p:cNvSpPr/>
+          <p:nvPr/>
+        </p:nvSpPr>
+        <p:spPr>
+          <a:xfrm>
+            <a:off x="3659437" y="1090665"/>
+            <a:ext cx="385591" cy="385591"/>
+          </a:xfrm>
+          <a:prstGeom prst="rect">
+            <a:avLst/>
+          </a:prstGeom>
+        </p:spPr>
+        <p:style>
+          <a:lnRef idx="2">
+            <a:schemeClr val="accent6">
+              <a:shade val="15000"/>
+            </a:schemeClr>
+          </a:lnRef>
+          <a:fillRef idx="1">
+            <a:schemeClr val="accent6"/>
+          </a:fillRef>
+          <a:effectRef idx="0">
+            <a:schemeClr val="accent6"/>
+          </a:effectRef>
+          <a:fontRef idx="minor">
+            <a:schemeClr val="lt1"/>
+          </a:fontRef>
+        </p:style>
+        <p:txBody>
+          <a:bodyPr rtlCol="0" anchor="ctr"/>
+          <a:lstStyle/>
+          <a:p>
+            <a:pPr algn="ctr"/>
+            <a:r>
+              <a:rPr lang="en-BE" dirty="0"/>
+              <a:t>g</a:t>
+            </a:r>
+          </a:p>
+        </p:txBody>
+      </p:sp>
+      <p:sp>
+        <p:nvSpPr>
+          <p:cNvPr id="8" name="Rectangle 7">
+            <a:extLst>
+              <a:ext uri="{FF2B5EF4-FFF2-40B4-BE49-F238E27FC236}">
+                <a16:creationId xmlns:a16="http://schemas.microsoft.com/office/drawing/2014/main" id="{18BC2580-73CA-06E4-BD44-6D49F4AD9003}"/>
+              </a:ext>
+            </a:extLst>
+          </p:cNvPr>
+          <p:cNvSpPr/>
+          <p:nvPr/>
+        </p:nvSpPr>
+        <p:spPr>
+          <a:xfrm>
+            <a:off x="4164377" y="1090664"/>
+            <a:ext cx="385591" cy="385591"/>
+          </a:xfrm>
+          <a:prstGeom prst="rect">
+            <a:avLst/>
+          </a:prstGeom>
+        </p:spPr>
+        <p:style>
+          <a:lnRef idx="2">
+            <a:schemeClr val="accent1">
+              <a:shade val="15000"/>
+            </a:schemeClr>
+          </a:lnRef>
+          <a:fillRef idx="1">
+            <a:schemeClr val="accent1"/>
+          </a:fillRef>
+          <a:effectRef idx="0">
+            <a:schemeClr val="accent1"/>
+          </a:effectRef>
+          <a:fontRef idx="minor">
+            <a:schemeClr val="lt1"/>
+          </a:fontRef>
+        </p:style>
+        <p:txBody>
+          <a:bodyPr rtlCol="0" anchor="ctr"/>
+          <a:lstStyle/>
+          <a:p>
+            <a:pPr algn="ctr"/>
+            <a:r>
+              <a:rPr lang="en-BE" dirty="0"/>
+              <a:t>b</a:t>
+            </a:r>
+          </a:p>
+        </p:txBody>
+      </p:sp>
+      <p:sp>
+        <p:nvSpPr>
+          <p:cNvPr id="9" name="Rectangle 8">
+            <a:extLst>
+              <a:ext uri="{FF2B5EF4-FFF2-40B4-BE49-F238E27FC236}">
+                <a16:creationId xmlns:a16="http://schemas.microsoft.com/office/drawing/2014/main" id="{FB38329C-9D81-F9C3-8F88-1360107EF26F}"/>
+              </a:ext>
+            </a:extLst>
+          </p:cNvPr>
+          <p:cNvSpPr/>
+          <p:nvPr/>
+        </p:nvSpPr>
+        <p:spPr>
+          <a:xfrm>
+            <a:off x="4669317" y="1090663"/>
+            <a:ext cx="385591" cy="385591"/>
+          </a:xfrm>
+          <a:prstGeom prst="rect">
+            <a:avLst/>
+          </a:prstGeom>
+        </p:spPr>
+        <p:style>
+          <a:lnRef idx="2">
+            <a:schemeClr val="accent2">
+              <a:shade val="15000"/>
+            </a:schemeClr>
+          </a:lnRef>
+          <a:fillRef idx="1">
+            <a:schemeClr val="accent2"/>
+          </a:fillRef>
+          <a:effectRef idx="0">
+            <a:schemeClr val="accent2"/>
+          </a:effectRef>
+          <a:fontRef idx="minor">
+            <a:schemeClr val="lt1"/>
+          </a:fontRef>
+        </p:style>
+        <p:txBody>
+          <a:bodyPr rtlCol="0" anchor="ctr"/>
+          <a:lstStyle/>
+          <a:p>
+            <a:pPr algn="ctr"/>
+            <a:r>
+              <a:rPr lang="en-BE" dirty="0"/>
+              <a:t>o</a:t>
+            </a:r>
+          </a:p>
+        </p:txBody>
+      </p:sp>
+      <p:sp>
+        <p:nvSpPr>
+          <p:cNvPr id="10" name="Rectangle 9">
+            <a:extLst>
+              <a:ext uri="{FF2B5EF4-FFF2-40B4-BE49-F238E27FC236}">
+                <a16:creationId xmlns:a16="http://schemas.microsoft.com/office/drawing/2014/main" id="{0B79FCF2-6BE2-4DE8-8582-1D4A7E4CB8C0}"/>
+              </a:ext>
+            </a:extLst>
+          </p:cNvPr>
+          <p:cNvSpPr/>
+          <p:nvPr/>
+        </p:nvSpPr>
+        <p:spPr>
+          <a:xfrm>
+            <a:off x="5174257" y="1090662"/>
+            <a:ext cx="385591" cy="385591"/>
+          </a:xfrm>
+          <a:prstGeom prst="rect">
+            <a:avLst/>
+          </a:prstGeom>
+        </p:spPr>
+        <p:style>
+          <a:lnRef idx="2">
+            <a:schemeClr val="accent6">
+              <a:shade val="15000"/>
+            </a:schemeClr>
+          </a:lnRef>
+          <a:fillRef idx="1">
+            <a:schemeClr val="accent6"/>
+          </a:fillRef>
+          <a:effectRef idx="0">
+            <a:schemeClr val="accent6"/>
+          </a:effectRef>
+          <a:fontRef idx="minor">
+            <a:schemeClr val="lt1"/>
+          </a:fontRef>
+        </p:style>
+        <p:txBody>
+          <a:bodyPr rtlCol="0" anchor="ctr"/>
+          <a:lstStyle/>
+          <a:p>
+            <a:pPr algn="ctr"/>
+            <a:r>
+              <a:rPr lang="en-BE" dirty="0"/>
+              <a:t>g</a:t>
+            </a:r>
+          </a:p>
+        </p:txBody>
+      </p:sp>
+      <p:sp>
+        <p:nvSpPr>
+          <p:cNvPr id="11" name="Rectangle 10">
+            <a:extLst>
+              <a:ext uri="{FF2B5EF4-FFF2-40B4-BE49-F238E27FC236}">
+                <a16:creationId xmlns:a16="http://schemas.microsoft.com/office/drawing/2014/main" id="{2164FAC4-DD8A-0F2A-6247-6B4CF6FF5C73}"/>
+              </a:ext>
+            </a:extLst>
+          </p:cNvPr>
+          <p:cNvSpPr/>
+          <p:nvPr/>
+        </p:nvSpPr>
+        <p:spPr>
+          <a:xfrm>
+            <a:off x="5679197" y="1090661"/>
+            <a:ext cx="385591" cy="385591"/>
+          </a:xfrm>
+          <a:prstGeom prst="rect">
+            <a:avLst/>
+          </a:prstGeom>
+        </p:spPr>
+        <p:style>
+          <a:lnRef idx="2">
+            <a:schemeClr val="accent6">
+              <a:shade val="15000"/>
+            </a:schemeClr>
+          </a:lnRef>
+          <a:fillRef idx="1">
+            <a:schemeClr val="accent6"/>
+          </a:fillRef>
+          <a:effectRef idx="0">
+            <a:schemeClr val="accent6"/>
+          </a:effectRef>
+          <a:fontRef idx="minor">
+            <a:schemeClr val="lt1"/>
+          </a:fontRef>
+        </p:style>
+        <p:txBody>
+          <a:bodyPr rtlCol="0" anchor="ctr"/>
+          <a:lstStyle/>
+          <a:p>
+            <a:pPr algn="ctr"/>
+            <a:r>
+              <a:rPr lang="en-BE" dirty="0"/>
+              <a:t>g</a:t>
+            </a:r>
+          </a:p>
+        </p:txBody>
+      </p:sp>
+      <p:sp>
+        <p:nvSpPr>
+          <p:cNvPr id="12" name="Rectangle 11">
+            <a:extLst>
+              <a:ext uri="{FF2B5EF4-FFF2-40B4-BE49-F238E27FC236}">
+                <a16:creationId xmlns:a16="http://schemas.microsoft.com/office/drawing/2014/main" id="{AF634CFF-8C3A-49F8-F9AD-9876D577AED8}"/>
+              </a:ext>
+            </a:extLst>
+          </p:cNvPr>
+          <p:cNvSpPr/>
+          <p:nvPr/>
+        </p:nvSpPr>
+        <p:spPr>
+          <a:xfrm>
+            <a:off x="6184137" y="1090660"/>
+            <a:ext cx="385591" cy="385591"/>
+          </a:xfrm>
+          <a:prstGeom prst="rect">
+            <a:avLst/>
+          </a:prstGeom>
+        </p:spPr>
+        <p:style>
+          <a:lnRef idx="2">
+            <a:schemeClr val="accent1">
+              <a:shade val="15000"/>
+            </a:schemeClr>
+          </a:lnRef>
+          <a:fillRef idx="1">
+            <a:schemeClr val="accent1"/>
+          </a:fillRef>
+          <a:effectRef idx="0">
+            <a:schemeClr val="accent1"/>
+          </a:effectRef>
+          <a:fontRef idx="minor">
+            <a:schemeClr val="lt1"/>
+          </a:fontRef>
+        </p:style>
+        <p:txBody>
+          <a:bodyPr rtlCol="0" anchor="ctr"/>
+          <a:lstStyle/>
+          <a:p>
+            <a:pPr algn="ctr"/>
+            <a:r>
+              <a:rPr lang="en-BE" dirty="0"/>
+              <a:t>b</a:t>
+            </a:r>
+          </a:p>
+        </p:txBody>
+      </p:sp>
+      <p:sp>
+        <p:nvSpPr>
+          <p:cNvPr id="13" name="Rectangle 12">
+            <a:extLst>
+              <a:ext uri="{FF2B5EF4-FFF2-40B4-BE49-F238E27FC236}">
+                <a16:creationId xmlns:a16="http://schemas.microsoft.com/office/drawing/2014/main" id="{D4BD35CC-F5B8-CA33-C055-F570F58DF2A6}"/>
+              </a:ext>
+            </a:extLst>
+          </p:cNvPr>
+          <p:cNvSpPr/>
+          <p:nvPr/>
+        </p:nvSpPr>
+        <p:spPr>
+          <a:xfrm>
+            <a:off x="6689077" y="1090659"/>
+            <a:ext cx="385591" cy="385591"/>
+          </a:xfrm>
+          <a:prstGeom prst="rect">
+            <a:avLst/>
+          </a:prstGeom>
+        </p:spPr>
+        <p:style>
+          <a:lnRef idx="2">
+            <a:schemeClr val="accent2">
+              <a:shade val="15000"/>
+            </a:schemeClr>
+          </a:lnRef>
+          <a:fillRef idx="1">
+            <a:schemeClr val="accent2"/>
+          </a:fillRef>
+          <a:effectRef idx="0">
+            <a:schemeClr val="accent2"/>
+          </a:effectRef>
+          <a:fontRef idx="minor">
+            <a:schemeClr val="lt1"/>
+          </a:fontRef>
+        </p:style>
+        <p:txBody>
+          <a:bodyPr rtlCol="0" anchor="ctr"/>
+          <a:lstStyle/>
+          <a:p>
+            <a:pPr algn="ctr"/>
+            <a:r>
+              <a:rPr lang="en-BE" dirty="0"/>
+              <a:t>o</a:t>
+            </a:r>
+          </a:p>
+        </p:txBody>
+      </p:sp>
+      <p:sp>
+        <p:nvSpPr>
+          <p:cNvPr id="14" name="Rectangle 13">
+            <a:extLst>
+              <a:ext uri="{FF2B5EF4-FFF2-40B4-BE49-F238E27FC236}">
+                <a16:creationId xmlns:a16="http://schemas.microsoft.com/office/drawing/2014/main" id="{D7D9BD54-E9DE-F738-4669-D674F63DFAD3}"/>
+              </a:ext>
+            </a:extLst>
+          </p:cNvPr>
+          <p:cNvSpPr/>
+          <p:nvPr/>
+        </p:nvSpPr>
+        <p:spPr>
+          <a:xfrm>
+            <a:off x="7194017" y="1090658"/>
+            <a:ext cx="385591" cy="385591"/>
+          </a:xfrm>
+          <a:prstGeom prst="rect">
+            <a:avLst/>
+          </a:prstGeom>
+        </p:spPr>
+        <p:style>
+          <a:lnRef idx="2">
+            <a:schemeClr val="accent6">
+              <a:shade val="15000"/>
+            </a:schemeClr>
+          </a:lnRef>
+          <a:fillRef idx="1">
+            <a:schemeClr val="accent6"/>
+          </a:fillRef>
+          <a:effectRef idx="0">
+            <a:schemeClr val="accent6"/>
+          </a:effectRef>
+          <a:fontRef idx="minor">
+            <a:schemeClr val="lt1"/>
+          </a:fontRef>
+        </p:style>
+        <p:txBody>
+          <a:bodyPr rtlCol="0" anchor="ctr"/>
+          <a:lstStyle/>
+          <a:p>
+            <a:pPr algn="ctr"/>
+            <a:r>
+              <a:rPr lang="en-BE" dirty="0"/>
+              <a:t>g</a:t>
+            </a:r>
+          </a:p>
+        </p:txBody>
+      </p:sp>
+      <p:sp>
+        <p:nvSpPr>
+          <p:cNvPr id="15" name="Rectangle 14">
+            <a:extLst>
+              <a:ext uri="{FF2B5EF4-FFF2-40B4-BE49-F238E27FC236}">
+                <a16:creationId xmlns:a16="http://schemas.microsoft.com/office/drawing/2014/main" id="{93B14C7A-8100-61AF-5BC2-6BD1220E1580}"/>
+              </a:ext>
+            </a:extLst>
+          </p:cNvPr>
+          <p:cNvSpPr/>
+          <p:nvPr/>
+        </p:nvSpPr>
+        <p:spPr>
+          <a:xfrm>
+            <a:off x="7698957" y="1090657"/>
+            <a:ext cx="385591" cy="385591"/>
+          </a:xfrm>
+          <a:prstGeom prst="rect">
+            <a:avLst/>
+          </a:prstGeom>
+        </p:spPr>
+        <p:style>
+          <a:lnRef idx="2">
+            <a:schemeClr val="accent6">
+              <a:shade val="15000"/>
+            </a:schemeClr>
+          </a:lnRef>
+          <a:fillRef idx="1">
+            <a:schemeClr val="accent6"/>
+          </a:fillRef>
+          <a:effectRef idx="0">
+            <a:schemeClr val="accent6"/>
+          </a:effectRef>
+          <a:fontRef idx="minor">
+            <a:schemeClr val="lt1"/>
+          </a:fontRef>
+        </p:style>
+        <p:txBody>
+          <a:bodyPr rtlCol="0" anchor="ctr"/>
+          <a:lstStyle/>
+          <a:p>
+            <a:pPr algn="ctr"/>
+            <a:r>
+              <a:rPr lang="en-BE" dirty="0"/>
+              <a:t>g</a:t>
+            </a:r>
+          </a:p>
+        </p:txBody>
+      </p:sp>
+      <p:sp>
+        <p:nvSpPr>
+          <p:cNvPr id="16" name="Rectangle 15">
+            <a:extLst>
+              <a:ext uri="{FF2B5EF4-FFF2-40B4-BE49-F238E27FC236}">
+                <a16:creationId xmlns:a16="http://schemas.microsoft.com/office/drawing/2014/main" id="{3735E3A9-71F8-3377-CEA2-CA9D63ED2858}"/>
+              </a:ext>
+            </a:extLst>
+          </p:cNvPr>
+          <p:cNvSpPr/>
+          <p:nvPr/>
+        </p:nvSpPr>
+        <p:spPr>
+          <a:xfrm>
+            <a:off x="8203897" y="1090656"/>
+            <a:ext cx="385591" cy="385591"/>
+          </a:xfrm>
+          <a:prstGeom prst="rect">
+            <a:avLst/>
+          </a:prstGeom>
+        </p:spPr>
+        <p:style>
+          <a:lnRef idx="2">
+            <a:schemeClr val="accent1">
+              <a:shade val="15000"/>
+            </a:schemeClr>
+          </a:lnRef>
+          <a:fillRef idx="1">
+            <a:schemeClr val="accent1"/>
+          </a:fillRef>
+          <a:effectRef idx="0">
+            <a:schemeClr val="accent1"/>
+          </a:effectRef>
+          <a:fontRef idx="minor">
+            <a:schemeClr val="lt1"/>
+          </a:fontRef>
+        </p:style>
+        <p:txBody>
+          <a:bodyPr rtlCol="0" anchor="ctr"/>
+          <a:lstStyle/>
+          <a:p>
+            <a:pPr algn="ctr"/>
+            <a:r>
+              <a:rPr lang="en-BE" dirty="0"/>
+              <a:t>b</a:t>
+            </a:r>
+          </a:p>
+        </p:txBody>
+      </p:sp>
+      <p:sp>
+        <p:nvSpPr>
+          <p:cNvPr id="17" name="Down Arrow 16">
+            <a:extLst>
+              <a:ext uri="{FF2B5EF4-FFF2-40B4-BE49-F238E27FC236}">
+                <a16:creationId xmlns:a16="http://schemas.microsoft.com/office/drawing/2014/main" id="{7DB593F7-AF1B-32A0-B442-DD07F50E7339}"/>
+              </a:ext>
+            </a:extLst>
+          </p:cNvPr>
+          <p:cNvSpPr/>
+          <p:nvPr/>
+        </p:nvSpPr>
+        <p:spPr>
+          <a:xfrm>
+            <a:off x="4862112" y="1796994"/>
+            <a:ext cx="624289" cy="462708"/>
+          </a:xfrm>
+          <a:prstGeom prst="downArrow">
+            <a:avLst/>
+          </a:prstGeom>
+        </p:spPr>
+        <p:style>
+          <a:lnRef idx="2">
+            <a:schemeClr val="dk1">
+              <a:shade val="15000"/>
+            </a:schemeClr>
+          </a:lnRef>
+          <a:fillRef idx="1">
+            <a:schemeClr val="dk1"/>
+          </a:fillRef>
+          <a:effectRef idx="0">
+            <a:schemeClr val="dk1"/>
+          </a:effectRef>
+          <a:fontRef idx="minor">
+            <a:schemeClr val="lt1"/>
+          </a:fontRef>
+        </p:style>
+        <p:txBody>
+          <a:bodyPr rtlCol="0" anchor="ctr"/>
+          <a:lstStyle/>
+          <a:p>
+            <a:pPr algn="ctr"/>
+            <a:endParaRPr lang="en-BE"/>
+          </a:p>
+        </p:txBody>
+      </p:sp>
+      <p:sp>
+        <p:nvSpPr>
+          <p:cNvPr id="18" name="Rectangle 17">
+            <a:extLst>
+              <a:ext uri="{FF2B5EF4-FFF2-40B4-BE49-F238E27FC236}">
+                <a16:creationId xmlns:a16="http://schemas.microsoft.com/office/drawing/2014/main" id="{821BB19B-3D27-30AA-3B37-5A0681CBAA7C}"/>
+              </a:ext>
+            </a:extLst>
+          </p:cNvPr>
+          <p:cNvSpPr/>
+          <p:nvPr/>
+        </p:nvSpPr>
+        <p:spPr>
+          <a:xfrm>
+            <a:off x="1166870" y="2865582"/>
+            <a:ext cx="385591" cy="385591"/>
+          </a:xfrm>
+          <a:prstGeom prst="rect">
+            <a:avLst/>
+          </a:prstGeom>
+        </p:spPr>
+        <p:style>
+          <a:lnRef idx="2">
+            <a:schemeClr val="accent1">
+              <a:shade val="15000"/>
+            </a:schemeClr>
+          </a:lnRef>
+          <a:fillRef idx="1">
+            <a:schemeClr val="accent1"/>
+          </a:fillRef>
+          <a:effectRef idx="0">
+            <a:schemeClr val="accent1"/>
+          </a:effectRef>
+          <a:fontRef idx="minor">
+            <a:schemeClr val="lt1"/>
+          </a:fontRef>
+        </p:style>
+        <p:txBody>
+          <a:bodyPr rtlCol="0" anchor="ctr"/>
+          <a:lstStyle/>
+          <a:p>
+            <a:pPr algn="ctr"/>
+            <a:r>
+              <a:rPr lang="en-BE" dirty="0"/>
+              <a:t>b</a:t>
+            </a:r>
+          </a:p>
+        </p:txBody>
+      </p:sp>
+      <p:sp>
+        <p:nvSpPr>
+          <p:cNvPr id="19" name="Rectangle 18">
+            <a:extLst>
+              <a:ext uri="{FF2B5EF4-FFF2-40B4-BE49-F238E27FC236}">
+                <a16:creationId xmlns:a16="http://schemas.microsoft.com/office/drawing/2014/main" id="{AD40D11E-9EF9-D467-9B94-F84CF3422F05}"/>
+              </a:ext>
+            </a:extLst>
+          </p:cNvPr>
+          <p:cNvSpPr/>
+          <p:nvPr/>
+        </p:nvSpPr>
+        <p:spPr>
+          <a:xfrm>
+            <a:off x="1671810" y="2865582"/>
+            <a:ext cx="385591" cy="385591"/>
+          </a:xfrm>
+          <a:prstGeom prst="rect">
+            <a:avLst/>
+          </a:prstGeom>
+        </p:spPr>
+        <p:style>
+          <a:lnRef idx="2">
+            <a:schemeClr val="accent1">
+              <a:shade val="15000"/>
+            </a:schemeClr>
+          </a:lnRef>
+          <a:fillRef idx="1">
+            <a:schemeClr val="accent1"/>
+          </a:fillRef>
+          <a:effectRef idx="0">
+            <a:schemeClr val="accent1"/>
+          </a:effectRef>
+          <a:fontRef idx="minor">
+            <a:schemeClr val="lt1"/>
+          </a:fontRef>
+        </p:style>
+        <p:txBody>
+          <a:bodyPr rtlCol="0" anchor="ctr"/>
+          <a:lstStyle/>
+          <a:p>
+            <a:pPr algn="ctr"/>
+            <a:r>
+              <a:rPr lang="en-BE" dirty="0"/>
+              <a:t>b</a:t>
+            </a:r>
+          </a:p>
+        </p:txBody>
+      </p:sp>
+      <p:sp>
+        <p:nvSpPr>
+          <p:cNvPr id="20" name="Rectangle 19">
+            <a:extLst>
+              <a:ext uri="{FF2B5EF4-FFF2-40B4-BE49-F238E27FC236}">
+                <a16:creationId xmlns:a16="http://schemas.microsoft.com/office/drawing/2014/main" id="{197A98A1-F720-FD0F-5090-DA01A8AF0E23}"/>
+              </a:ext>
+            </a:extLst>
+          </p:cNvPr>
+          <p:cNvSpPr/>
+          <p:nvPr/>
+        </p:nvSpPr>
+        <p:spPr>
+          <a:xfrm>
+            <a:off x="2176750" y="2865582"/>
+            <a:ext cx="385591" cy="385591"/>
+          </a:xfrm>
+          <a:prstGeom prst="rect">
+            <a:avLst/>
+          </a:prstGeom>
+        </p:spPr>
+        <p:style>
+          <a:lnRef idx="2">
+            <a:schemeClr val="accent1">
+              <a:shade val="15000"/>
+            </a:schemeClr>
+          </a:lnRef>
+          <a:fillRef idx="1">
+            <a:schemeClr val="accent1"/>
+          </a:fillRef>
+          <a:effectRef idx="0">
+            <a:schemeClr val="accent1"/>
+          </a:effectRef>
+          <a:fontRef idx="minor">
+            <a:schemeClr val="lt1"/>
+          </a:fontRef>
+        </p:style>
+        <p:txBody>
+          <a:bodyPr rtlCol="0" anchor="ctr"/>
+          <a:lstStyle/>
+          <a:p>
+            <a:pPr algn="ctr"/>
+            <a:r>
+              <a:rPr lang="en-BE" dirty="0"/>
+              <a:t>b</a:t>
+            </a:r>
+          </a:p>
+        </p:txBody>
+      </p:sp>
+      <p:sp>
+        <p:nvSpPr>
+          <p:cNvPr id="21" name="Rectangle 20">
+            <a:extLst>
+              <a:ext uri="{FF2B5EF4-FFF2-40B4-BE49-F238E27FC236}">
+                <a16:creationId xmlns:a16="http://schemas.microsoft.com/office/drawing/2014/main" id="{E4DED48D-5E9C-3145-37F7-15E24C8FDF88}"/>
+              </a:ext>
+            </a:extLst>
+          </p:cNvPr>
+          <p:cNvSpPr/>
+          <p:nvPr/>
+        </p:nvSpPr>
+        <p:spPr>
+          <a:xfrm>
+            <a:off x="2681690" y="2865582"/>
+            <a:ext cx="385591" cy="385591"/>
+          </a:xfrm>
+          <a:prstGeom prst="rect">
+            <a:avLst/>
+          </a:prstGeom>
+        </p:spPr>
+        <p:style>
+          <a:lnRef idx="2">
+            <a:schemeClr val="accent1">
+              <a:shade val="15000"/>
+            </a:schemeClr>
+          </a:lnRef>
+          <a:fillRef idx="1">
+            <a:schemeClr val="accent1"/>
+          </a:fillRef>
+          <a:effectRef idx="0">
+            <a:schemeClr val="accent1"/>
+          </a:effectRef>
+          <a:fontRef idx="minor">
+            <a:schemeClr val="lt1"/>
+          </a:fontRef>
+        </p:style>
+        <p:txBody>
+          <a:bodyPr rtlCol="0" anchor="ctr"/>
+          <a:lstStyle/>
+          <a:p>
+            <a:pPr algn="ctr"/>
+            <a:r>
+              <a:rPr lang="en-BE" dirty="0"/>
+              <a:t>b</a:t>
+            </a:r>
+          </a:p>
+        </p:txBody>
+      </p:sp>
+      <p:sp>
+        <p:nvSpPr>
+          <p:cNvPr id="23" name="Rectangle 22">
+            <a:extLst>
+              <a:ext uri="{FF2B5EF4-FFF2-40B4-BE49-F238E27FC236}">
+                <a16:creationId xmlns:a16="http://schemas.microsoft.com/office/drawing/2014/main" id="{8DF14AB8-91FB-032C-E30A-CF99600AEA26}"/>
+              </a:ext>
+            </a:extLst>
+          </p:cNvPr>
+          <p:cNvSpPr/>
+          <p:nvPr/>
+        </p:nvSpPr>
+        <p:spPr>
+          <a:xfrm>
+            <a:off x="3944040" y="2865581"/>
+            <a:ext cx="385591" cy="385591"/>
+          </a:xfrm>
+          <a:prstGeom prst="rect">
+            <a:avLst/>
+          </a:prstGeom>
+        </p:spPr>
+        <p:style>
+          <a:lnRef idx="2">
+            <a:schemeClr val="accent2">
+              <a:shade val="15000"/>
+            </a:schemeClr>
+          </a:lnRef>
+          <a:fillRef idx="1">
+            <a:schemeClr val="accent2"/>
+          </a:fillRef>
+          <a:effectRef idx="0">
+            <a:schemeClr val="accent2"/>
+          </a:effectRef>
+          <a:fontRef idx="minor">
+            <a:schemeClr val="lt1"/>
+          </a:fontRef>
+        </p:style>
+        <p:txBody>
+          <a:bodyPr rtlCol="0" anchor="ctr"/>
+          <a:lstStyle/>
+          <a:p>
+            <a:pPr algn="ctr"/>
+            <a:r>
+              <a:rPr lang="en-BE" dirty="0"/>
+              <a:t>o</a:t>
+            </a:r>
+          </a:p>
+        </p:txBody>
+      </p:sp>
+      <p:sp>
+        <p:nvSpPr>
+          <p:cNvPr id="24" name="Rectangle 23">
+            <a:extLst>
+              <a:ext uri="{FF2B5EF4-FFF2-40B4-BE49-F238E27FC236}">
+                <a16:creationId xmlns:a16="http://schemas.microsoft.com/office/drawing/2014/main" id="{4E38125C-D16B-5C56-25A1-2D0318DFD48A}"/>
+              </a:ext>
+            </a:extLst>
+          </p:cNvPr>
+          <p:cNvSpPr/>
+          <p:nvPr/>
+        </p:nvSpPr>
+        <p:spPr>
+          <a:xfrm>
+            <a:off x="4448980" y="2865580"/>
+            <a:ext cx="385591" cy="385591"/>
+          </a:xfrm>
+          <a:prstGeom prst="rect">
+            <a:avLst/>
+          </a:prstGeom>
+        </p:spPr>
+        <p:style>
+          <a:lnRef idx="2">
+            <a:schemeClr val="accent2">
+              <a:shade val="15000"/>
+            </a:schemeClr>
+          </a:lnRef>
+          <a:fillRef idx="1">
+            <a:schemeClr val="accent2"/>
+          </a:fillRef>
+          <a:effectRef idx="0">
+            <a:schemeClr val="accent2"/>
+          </a:effectRef>
+          <a:fontRef idx="minor">
+            <a:schemeClr val="lt1"/>
+          </a:fontRef>
+        </p:style>
+        <p:txBody>
+          <a:bodyPr rtlCol="0" anchor="ctr"/>
+          <a:lstStyle/>
+          <a:p>
+            <a:pPr algn="ctr"/>
+            <a:r>
+              <a:rPr lang="en-BE" dirty="0"/>
+              <a:t>o</a:t>
+            </a:r>
+          </a:p>
+        </p:txBody>
+      </p:sp>
+      <p:sp>
+        <p:nvSpPr>
+          <p:cNvPr id="25" name="Rectangle 24">
+            <a:extLst>
+              <a:ext uri="{FF2B5EF4-FFF2-40B4-BE49-F238E27FC236}">
+                <a16:creationId xmlns:a16="http://schemas.microsoft.com/office/drawing/2014/main" id="{4C4C34C5-5AAB-2028-0092-B4AD8FC5F45F}"/>
+              </a:ext>
+            </a:extLst>
+          </p:cNvPr>
+          <p:cNvSpPr/>
+          <p:nvPr/>
+        </p:nvSpPr>
+        <p:spPr>
+          <a:xfrm>
+            <a:off x="4953921" y="2865580"/>
+            <a:ext cx="385591" cy="385591"/>
+          </a:xfrm>
+          <a:prstGeom prst="rect">
+            <a:avLst/>
+          </a:prstGeom>
+        </p:spPr>
+        <p:style>
+          <a:lnRef idx="2">
+            <a:schemeClr val="accent2">
+              <a:shade val="15000"/>
+            </a:schemeClr>
+          </a:lnRef>
+          <a:fillRef idx="1">
+            <a:schemeClr val="accent2"/>
+          </a:fillRef>
+          <a:effectRef idx="0">
+            <a:schemeClr val="accent2"/>
+          </a:effectRef>
+          <a:fontRef idx="minor">
+            <a:schemeClr val="lt1"/>
+          </a:fontRef>
+        </p:style>
+        <p:txBody>
+          <a:bodyPr rtlCol="0" anchor="ctr"/>
+          <a:lstStyle/>
+          <a:p>
+            <a:pPr algn="ctr"/>
+            <a:r>
+              <a:rPr lang="en-BE" dirty="0"/>
+              <a:t>o</a:t>
+            </a:r>
+          </a:p>
+        </p:txBody>
+      </p:sp>
+      <p:sp>
+        <p:nvSpPr>
+          <p:cNvPr id="26" name="Rectangle 25">
+            <a:extLst>
+              <a:ext uri="{FF2B5EF4-FFF2-40B4-BE49-F238E27FC236}">
+                <a16:creationId xmlns:a16="http://schemas.microsoft.com/office/drawing/2014/main" id="{D95A1CAA-8B5A-8345-496F-6F2A72A401CD}"/>
+              </a:ext>
+            </a:extLst>
+          </p:cNvPr>
+          <p:cNvSpPr/>
+          <p:nvPr/>
+        </p:nvSpPr>
+        <p:spPr>
+          <a:xfrm>
+            <a:off x="5458862" y="2865580"/>
+            <a:ext cx="385591" cy="385591"/>
+          </a:xfrm>
+          <a:prstGeom prst="rect">
+            <a:avLst/>
+          </a:prstGeom>
+        </p:spPr>
+        <p:style>
+          <a:lnRef idx="2">
+            <a:schemeClr val="accent2">
+              <a:shade val="15000"/>
+            </a:schemeClr>
+          </a:lnRef>
+          <a:fillRef idx="1">
+            <a:schemeClr val="accent2"/>
+          </a:fillRef>
+          <a:effectRef idx="0">
+            <a:schemeClr val="accent2"/>
+          </a:effectRef>
+          <a:fontRef idx="minor">
+            <a:schemeClr val="lt1"/>
+          </a:fontRef>
+        </p:style>
+        <p:txBody>
+          <a:bodyPr rtlCol="0" anchor="ctr"/>
+          <a:lstStyle/>
+          <a:p>
+            <a:pPr algn="ctr"/>
+            <a:r>
+              <a:rPr lang="en-BE" dirty="0"/>
+              <a:t>o</a:t>
+            </a:r>
+          </a:p>
+        </p:txBody>
+      </p:sp>
+      <p:sp>
+        <p:nvSpPr>
+          <p:cNvPr id="27" name="Rectangle 26">
+            <a:extLst>
+              <a:ext uri="{FF2B5EF4-FFF2-40B4-BE49-F238E27FC236}">
+                <a16:creationId xmlns:a16="http://schemas.microsoft.com/office/drawing/2014/main" id="{BBFBE503-8DAF-0525-FA05-1DD83063AF80}"/>
+              </a:ext>
+            </a:extLst>
+          </p:cNvPr>
+          <p:cNvSpPr/>
+          <p:nvPr/>
+        </p:nvSpPr>
+        <p:spPr>
+          <a:xfrm>
+            <a:off x="5963803" y="2865580"/>
+            <a:ext cx="385591" cy="385591"/>
+          </a:xfrm>
+          <a:prstGeom prst="rect">
+            <a:avLst/>
+          </a:prstGeom>
+        </p:spPr>
+        <p:style>
+          <a:lnRef idx="2">
+            <a:schemeClr val="accent2">
+              <a:shade val="15000"/>
+            </a:schemeClr>
+          </a:lnRef>
+          <a:fillRef idx="1">
+            <a:schemeClr val="accent2"/>
+          </a:fillRef>
+          <a:effectRef idx="0">
+            <a:schemeClr val="accent2"/>
+          </a:effectRef>
+          <a:fontRef idx="minor">
+            <a:schemeClr val="lt1"/>
+          </a:fontRef>
+        </p:style>
+        <p:txBody>
+          <a:bodyPr rtlCol="0" anchor="ctr"/>
+          <a:lstStyle/>
+          <a:p>
+            <a:pPr algn="ctr"/>
+            <a:r>
+              <a:rPr lang="en-BE" dirty="0"/>
+              <a:t>o</a:t>
+            </a:r>
+          </a:p>
+        </p:txBody>
+      </p:sp>
+      <p:sp>
+        <p:nvSpPr>
+          <p:cNvPr id="28" name="Rectangle 27">
+            <a:extLst>
+              <a:ext uri="{FF2B5EF4-FFF2-40B4-BE49-F238E27FC236}">
+                <a16:creationId xmlns:a16="http://schemas.microsoft.com/office/drawing/2014/main" id="{272CAC85-47CD-B2E0-C356-FCF3E063D4F1}"/>
+              </a:ext>
+            </a:extLst>
+          </p:cNvPr>
+          <p:cNvSpPr/>
+          <p:nvPr/>
+        </p:nvSpPr>
+        <p:spPr>
+          <a:xfrm>
+            <a:off x="7014076" y="2865579"/>
+            <a:ext cx="385591" cy="385591"/>
+          </a:xfrm>
+          <a:prstGeom prst="rect">
+            <a:avLst/>
+          </a:prstGeom>
+        </p:spPr>
+        <p:style>
+          <a:lnRef idx="2">
+            <a:schemeClr val="accent6">
+              <a:shade val="15000"/>
+            </a:schemeClr>
+          </a:lnRef>
+          <a:fillRef idx="1">
+            <a:schemeClr val="accent6"/>
+          </a:fillRef>
+          <a:effectRef idx="0">
+            <a:schemeClr val="accent6"/>
+          </a:effectRef>
+          <a:fontRef idx="minor">
+            <a:schemeClr val="lt1"/>
+          </a:fontRef>
+        </p:style>
+        <p:txBody>
+          <a:bodyPr rtlCol="0" anchor="ctr"/>
+          <a:lstStyle/>
+          <a:p>
+            <a:pPr algn="ctr"/>
+            <a:r>
+              <a:rPr lang="en-BE" dirty="0"/>
+              <a:t>g</a:t>
+            </a:r>
+          </a:p>
+        </p:txBody>
+      </p:sp>
+      <p:sp>
+        <p:nvSpPr>
+          <p:cNvPr id="29" name="Rectangle 28">
+            <a:extLst>
+              <a:ext uri="{FF2B5EF4-FFF2-40B4-BE49-F238E27FC236}">
+                <a16:creationId xmlns:a16="http://schemas.microsoft.com/office/drawing/2014/main" id="{12BE0591-F93D-D1FB-E4FB-ABF293D83B40}"/>
+              </a:ext>
+            </a:extLst>
+          </p:cNvPr>
+          <p:cNvSpPr/>
+          <p:nvPr/>
+        </p:nvSpPr>
+        <p:spPr>
+          <a:xfrm>
+            <a:off x="7519016" y="2865578"/>
+            <a:ext cx="385591" cy="385591"/>
+          </a:xfrm>
+          <a:prstGeom prst="rect">
+            <a:avLst/>
+          </a:prstGeom>
+        </p:spPr>
+        <p:style>
+          <a:lnRef idx="2">
+            <a:schemeClr val="accent6">
+              <a:shade val="15000"/>
+            </a:schemeClr>
+          </a:lnRef>
+          <a:fillRef idx="1">
+            <a:schemeClr val="accent6"/>
+          </a:fillRef>
+          <a:effectRef idx="0">
+            <a:schemeClr val="accent6"/>
+          </a:effectRef>
+          <a:fontRef idx="minor">
+            <a:schemeClr val="lt1"/>
+          </a:fontRef>
+        </p:style>
+        <p:txBody>
+          <a:bodyPr rtlCol="0" anchor="ctr"/>
+          <a:lstStyle/>
+          <a:p>
+            <a:pPr algn="ctr"/>
+            <a:r>
+              <a:rPr lang="en-BE" dirty="0"/>
+              <a:t>g</a:t>
+            </a:r>
+          </a:p>
+        </p:txBody>
+      </p:sp>
+      <p:sp>
+        <p:nvSpPr>
+          <p:cNvPr id="30" name="Rectangle 29">
+            <a:extLst>
+              <a:ext uri="{FF2B5EF4-FFF2-40B4-BE49-F238E27FC236}">
+                <a16:creationId xmlns:a16="http://schemas.microsoft.com/office/drawing/2014/main" id="{C8FA5934-A2E9-4EC7-A34D-BA9E12BB7CEF}"/>
+              </a:ext>
+            </a:extLst>
+          </p:cNvPr>
+          <p:cNvSpPr/>
+          <p:nvPr/>
+        </p:nvSpPr>
+        <p:spPr>
+          <a:xfrm>
+            <a:off x="8023956" y="2865577"/>
+            <a:ext cx="385591" cy="385591"/>
+          </a:xfrm>
+          <a:prstGeom prst="rect">
+            <a:avLst/>
+          </a:prstGeom>
+        </p:spPr>
+        <p:style>
+          <a:lnRef idx="2">
+            <a:schemeClr val="accent6">
+              <a:shade val="15000"/>
+            </a:schemeClr>
+          </a:lnRef>
+          <a:fillRef idx="1">
+            <a:schemeClr val="accent6"/>
+          </a:fillRef>
+          <a:effectRef idx="0">
+            <a:schemeClr val="accent6"/>
+          </a:effectRef>
+          <a:fontRef idx="minor">
+            <a:schemeClr val="lt1"/>
+          </a:fontRef>
+        </p:style>
+        <p:txBody>
+          <a:bodyPr rtlCol="0" anchor="ctr"/>
+          <a:lstStyle/>
+          <a:p>
+            <a:pPr algn="ctr"/>
+            <a:r>
+              <a:rPr lang="en-BE" dirty="0"/>
+              <a:t>g</a:t>
+            </a:r>
+          </a:p>
+        </p:txBody>
+      </p:sp>
+      <p:sp>
+        <p:nvSpPr>
+          <p:cNvPr id="31" name="Rectangle 30">
+            <a:extLst>
+              <a:ext uri="{FF2B5EF4-FFF2-40B4-BE49-F238E27FC236}">
+                <a16:creationId xmlns:a16="http://schemas.microsoft.com/office/drawing/2014/main" id="{FE209062-AE76-4648-F1D9-EA63E2F60CE0}"/>
+              </a:ext>
+            </a:extLst>
+          </p:cNvPr>
+          <p:cNvSpPr/>
+          <p:nvPr/>
+        </p:nvSpPr>
+        <p:spPr>
+          <a:xfrm>
+            <a:off x="8528896" y="2865576"/>
+            <a:ext cx="385591" cy="385591"/>
+          </a:xfrm>
+          <a:prstGeom prst="rect">
+            <a:avLst/>
+          </a:prstGeom>
+        </p:spPr>
+        <p:style>
+          <a:lnRef idx="2">
+            <a:schemeClr val="accent6">
+              <a:shade val="15000"/>
+            </a:schemeClr>
+          </a:lnRef>
+          <a:fillRef idx="1">
+            <a:schemeClr val="accent6"/>
+          </a:fillRef>
+          <a:effectRef idx="0">
+            <a:schemeClr val="accent6"/>
+          </a:effectRef>
+          <a:fontRef idx="minor">
+            <a:schemeClr val="lt1"/>
+          </a:fontRef>
+        </p:style>
+        <p:txBody>
+          <a:bodyPr rtlCol="0" anchor="ctr"/>
+          <a:lstStyle/>
+          <a:p>
+            <a:pPr algn="ctr"/>
+            <a:r>
+              <a:rPr lang="en-BE" dirty="0"/>
+              <a:t>g</a:t>
+            </a:r>
+          </a:p>
+        </p:txBody>
+      </p:sp>
+      <p:sp>
+        <p:nvSpPr>
+          <p:cNvPr id="32" name="Rectangle 31">
+            <a:extLst>
+              <a:ext uri="{FF2B5EF4-FFF2-40B4-BE49-F238E27FC236}">
+                <a16:creationId xmlns:a16="http://schemas.microsoft.com/office/drawing/2014/main" id="{4B12B22E-13D2-4254-533C-17AD281DD6A7}"/>
+              </a:ext>
+            </a:extLst>
+          </p:cNvPr>
+          <p:cNvSpPr/>
+          <p:nvPr/>
+        </p:nvSpPr>
+        <p:spPr>
+          <a:xfrm>
+            <a:off x="9033836" y="2865575"/>
+            <a:ext cx="385591" cy="385591"/>
+          </a:xfrm>
+          <a:prstGeom prst="rect">
+            <a:avLst/>
+          </a:prstGeom>
+        </p:spPr>
+        <p:style>
+          <a:lnRef idx="2">
+            <a:schemeClr val="accent6">
+              <a:shade val="15000"/>
+            </a:schemeClr>
+          </a:lnRef>
+          <a:fillRef idx="1">
+            <a:schemeClr val="accent6"/>
+          </a:fillRef>
+          <a:effectRef idx="0">
+            <a:schemeClr val="accent6"/>
+          </a:effectRef>
+          <a:fontRef idx="minor">
+            <a:schemeClr val="lt1"/>
+          </a:fontRef>
+        </p:style>
+        <p:txBody>
+          <a:bodyPr rtlCol="0" anchor="ctr"/>
+          <a:lstStyle/>
+          <a:p>
+            <a:pPr algn="ctr"/>
+            <a:r>
+              <a:rPr lang="en-BE" dirty="0"/>
+              <a:t>g</a:t>
+            </a:r>
+          </a:p>
+        </p:txBody>
+      </p:sp>
+      <p:sp>
+        <p:nvSpPr>
+          <p:cNvPr id="33" name="Down Arrow 32">
+            <a:extLst>
+              <a:ext uri="{FF2B5EF4-FFF2-40B4-BE49-F238E27FC236}">
+                <a16:creationId xmlns:a16="http://schemas.microsoft.com/office/drawing/2014/main" id="{FECF3BB2-83A2-D91E-DAC1-3DE40783E919}"/>
+              </a:ext>
+            </a:extLst>
+          </p:cNvPr>
+          <p:cNvSpPr/>
+          <p:nvPr/>
+        </p:nvSpPr>
+        <p:spPr>
+          <a:xfrm>
+            <a:off x="1839821" y="3571112"/>
+            <a:ext cx="624289" cy="462708"/>
+          </a:xfrm>
+          <a:prstGeom prst="downArrow">
+            <a:avLst/>
+          </a:prstGeom>
+        </p:spPr>
+        <p:style>
+          <a:lnRef idx="2">
+            <a:schemeClr val="dk1">
+              <a:shade val="15000"/>
+            </a:schemeClr>
+          </a:lnRef>
+          <a:fillRef idx="1">
+            <a:schemeClr val="dk1"/>
+          </a:fillRef>
+          <a:effectRef idx="0">
+            <a:schemeClr val="dk1"/>
+          </a:effectRef>
+          <a:fontRef idx="minor">
+            <a:schemeClr val="lt1"/>
+          </a:fontRef>
+        </p:style>
+        <p:txBody>
+          <a:bodyPr rtlCol="0" anchor="ctr"/>
+          <a:lstStyle/>
+          <a:p>
+            <a:pPr algn="ctr"/>
+            <a:endParaRPr lang="en-BE"/>
+          </a:p>
+        </p:txBody>
+      </p:sp>
+      <p:sp>
+        <p:nvSpPr>
+          <p:cNvPr id="34" name="Down Arrow 33">
+            <a:extLst>
+              <a:ext uri="{FF2B5EF4-FFF2-40B4-BE49-F238E27FC236}">
+                <a16:creationId xmlns:a16="http://schemas.microsoft.com/office/drawing/2014/main" id="{E1218853-B399-B15A-F9CD-A75D61D794F9}"/>
+              </a:ext>
+            </a:extLst>
+          </p:cNvPr>
+          <p:cNvSpPr/>
+          <p:nvPr/>
+        </p:nvSpPr>
+        <p:spPr>
+          <a:xfrm>
+            <a:off x="4862111" y="3590392"/>
+            <a:ext cx="624289" cy="462708"/>
+          </a:xfrm>
+          <a:prstGeom prst="downArrow">
+            <a:avLst/>
+          </a:prstGeom>
+        </p:spPr>
+        <p:style>
+          <a:lnRef idx="2">
+            <a:schemeClr val="dk1">
+              <a:shade val="15000"/>
+            </a:schemeClr>
+          </a:lnRef>
+          <a:fillRef idx="1">
+            <a:schemeClr val="dk1"/>
+          </a:fillRef>
+          <a:effectRef idx="0">
+            <a:schemeClr val="dk1"/>
+          </a:effectRef>
+          <a:fontRef idx="minor">
+            <a:schemeClr val="lt1"/>
+          </a:fontRef>
+        </p:style>
+        <p:txBody>
+          <a:bodyPr rtlCol="0" anchor="ctr"/>
+          <a:lstStyle/>
+          <a:p>
+            <a:pPr algn="ctr"/>
+            <a:endParaRPr lang="en-BE"/>
+          </a:p>
+        </p:txBody>
+      </p:sp>
+      <p:sp>
+        <p:nvSpPr>
+          <p:cNvPr id="35" name="Down Arrow 34">
+            <a:extLst>
+              <a:ext uri="{FF2B5EF4-FFF2-40B4-BE49-F238E27FC236}">
+                <a16:creationId xmlns:a16="http://schemas.microsoft.com/office/drawing/2014/main" id="{C5812A54-05C9-EDE5-68DC-D243E5B0995D}"/>
+              </a:ext>
+            </a:extLst>
+          </p:cNvPr>
+          <p:cNvSpPr/>
+          <p:nvPr/>
+        </p:nvSpPr>
+        <p:spPr>
+          <a:xfrm>
+            <a:off x="7904606" y="3590392"/>
+            <a:ext cx="624289" cy="462708"/>
+          </a:xfrm>
+          <a:prstGeom prst="downArrow">
+            <a:avLst/>
+          </a:prstGeom>
+        </p:spPr>
+        <p:style>
+          <a:lnRef idx="2">
+            <a:schemeClr val="dk1">
+              <a:shade val="15000"/>
+            </a:schemeClr>
+          </a:lnRef>
+          <a:fillRef idx="1">
+            <a:schemeClr val="dk1"/>
+          </a:fillRef>
+          <a:effectRef idx="0">
+            <a:schemeClr val="dk1"/>
+          </a:effectRef>
+          <a:fontRef idx="minor">
+            <a:schemeClr val="lt1"/>
+          </a:fontRef>
+        </p:style>
+        <p:txBody>
+          <a:bodyPr rtlCol="0" anchor="ctr"/>
+          <a:lstStyle/>
+          <a:p>
+            <a:pPr algn="ctr"/>
+            <a:endParaRPr lang="en-BE"/>
+          </a:p>
+        </p:txBody>
+      </p:sp>
+      <p:sp>
+        <p:nvSpPr>
+          <p:cNvPr id="36" name="Oval 35">
+            <a:extLst>
+              <a:ext uri="{FF2B5EF4-FFF2-40B4-BE49-F238E27FC236}">
+                <a16:creationId xmlns:a16="http://schemas.microsoft.com/office/drawing/2014/main" id="{9CE01509-56D6-4ED9-0620-842FF0A953D8}"/>
+              </a:ext>
+            </a:extLst>
+          </p:cNvPr>
+          <p:cNvSpPr/>
+          <p:nvPr/>
+        </p:nvSpPr>
+        <p:spPr>
+          <a:xfrm>
+            <a:off x="1959169" y="4255995"/>
+            <a:ext cx="385591" cy="385591"/>
+          </a:xfrm>
+          <a:prstGeom prst="ellipse">
+            <a:avLst/>
+          </a:prstGeom>
+        </p:spPr>
+        <p:style>
+          <a:lnRef idx="2">
+            <a:schemeClr val="dk1"/>
+          </a:lnRef>
+          <a:fillRef idx="1">
+            <a:schemeClr val="lt1"/>
+          </a:fillRef>
+          <a:effectRef idx="0">
+            <a:schemeClr val="dk1"/>
+          </a:effectRef>
+          <a:fontRef idx="minor">
+            <a:schemeClr val="dk1"/>
+          </a:fontRef>
+        </p:style>
+        <p:txBody>
+          <a:bodyPr rtlCol="0" anchor="ctr"/>
+          <a:lstStyle/>
+          <a:p>
+            <a:pPr algn="ctr"/>
+            <a:r>
+              <a:rPr lang="en-BE" dirty="0"/>
+              <a:t>4</a:t>
+            </a:r>
+          </a:p>
+        </p:txBody>
+      </p:sp>
+      <p:sp>
+        <p:nvSpPr>
+          <p:cNvPr id="37" name="TextBox 36">
+            <a:extLst>
+              <a:ext uri="{FF2B5EF4-FFF2-40B4-BE49-F238E27FC236}">
+                <a16:creationId xmlns:a16="http://schemas.microsoft.com/office/drawing/2014/main" id="{FCE61DF3-4AD8-190B-69C1-ADAA139A809A}"/>
+              </a:ext>
+            </a:extLst>
+          </p:cNvPr>
+          <p:cNvSpPr txBox="1"/>
+          <p:nvPr/>
+        </p:nvSpPr>
+        <p:spPr>
+          <a:xfrm>
+            <a:off x="175767" y="109897"/>
+            <a:ext cx="5503430" cy="369332"/>
+          </a:xfrm>
+          <a:prstGeom prst="rect">
+            <a:avLst/>
+          </a:prstGeom>
+          <a:noFill/>
+        </p:spPr>
+        <p:txBody>
+          <a:bodyPr wrap="none" rtlCol="0">
+            <a:spAutoFit/>
+          </a:bodyPr>
+          <a:lstStyle/>
+          <a:p>
+            <a:r>
+              <a:rPr lang="en-BE" b="1" dirty="0">
+                <a:latin typeface="Consolas" panose="020B0609020204030204" pitchFamily="49" charset="0"/>
+                <a:cs typeface="Consolas" panose="020B0609020204030204" pitchFamily="49" charset="0"/>
+              </a:rPr>
+              <a:t>groupBy(Box::color, Collectors.counting())</a:t>
+            </a:r>
+          </a:p>
+        </p:txBody>
+      </p:sp>
+      <p:sp>
+        <p:nvSpPr>
+          <p:cNvPr id="39" name="Rectangle 38">
+            <a:extLst>
+              <a:ext uri="{FF2B5EF4-FFF2-40B4-BE49-F238E27FC236}">
+                <a16:creationId xmlns:a16="http://schemas.microsoft.com/office/drawing/2014/main" id="{343D67D5-4082-2FC7-38A3-62F3790DBBDC}"/>
+              </a:ext>
+            </a:extLst>
+          </p:cNvPr>
+          <p:cNvSpPr/>
+          <p:nvPr/>
+        </p:nvSpPr>
+        <p:spPr>
+          <a:xfrm>
+            <a:off x="9538776" y="2874749"/>
+            <a:ext cx="385591" cy="385591"/>
+          </a:xfrm>
+          <a:prstGeom prst="rect">
+            <a:avLst/>
+          </a:prstGeom>
+        </p:spPr>
+        <p:style>
+          <a:lnRef idx="2">
+            <a:schemeClr val="accent6">
+              <a:shade val="15000"/>
+            </a:schemeClr>
+          </a:lnRef>
+          <a:fillRef idx="1">
+            <a:schemeClr val="accent6"/>
+          </a:fillRef>
+          <a:effectRef idx="0">
+            <a:schemeClr val="accent6"/>
+          </a:effectRef>
+          <a:fontRef idx="minor">
+            <a:schemeClr val="lt1"/>
+          </a:fontRef>
+        </p:style>
+        <p:txBody>
+          <a:bodyPr rtlCol="0" anchor="ctr"/>
+          <a:lstStyle/>
+          <a:p>
+            <a:pPr algn="ctr"/>
+            <a:r>
+              <a:rPr lang="en-BE" dirty="0"/>
+              <a:t>g</a:t>
+            </a:r>
+          </a:p>
+        </p:txBody>
+      </p:sp>
+      <p:sp>
+        <p:nvSpPr>
+          <p:cNvPr id="40" name="Oval 39">
+            <a:extLst>
+              <a:ext uri="{FF2B5EF4-FFF2-40B4-BE49-F238E27FC236}">
+                <a16:creationId xmlns:a16="http://schemas.microsoft.com/office/drawing/2014/main" id="{9B87D2CE-72D9-4DAA-BA41-81E08D5734B0}"/>
+              </a:ext>
+            </a:extLst>
+          </p:cNvPr>
+          <p:cNvSpPr/>
+          <p:nvPr/>
+        </p:nvSpPr>
+        <p:spPr>
+          <a:xfrm>
+            <a:off x="4953921" y="4271601"/>
+            <a:ext cx="385591" cy="385591"/>
+          </a:xfrm>
+          <a:prstGeom prst="ellipse">
+            <a:avLst/>
+          </a:prstGeom>
+        </p:spPr>
+        <p:style>
+          <a:lnRef idx="2">
+            <a:schemeClr val="dk1"/>
+          </a:lnRef>
+          <a:fillRef idx="1">
+            <a:schemeClr val="lt1"/>
+          </a:fillRef>
+          <a:effectRef idx="0">
+            <a:schemeClr val="dk1"/>
+          </a:effectRef>
+          <a:fontRef idx="minor">
+            <a:schemeClr val="dk1"/>
+          </a:fontRef>
+        </p:style>
+        <p:txBody>
+          <a:bodyPr rtlCol="0" anchor="ctr"/>
+          <a:lstStyle/>
+          <a:p>
+            <a:pPr algn="ctr"/>
+            <a:r>
+              <a:rPr lang="en-BE" dirty="0"/>
+              <a:t>5</a:t>
+            </a:r>
+          </a:p>
+        </p:txBody>
+      </p:sp>
+      <p:sp>
+        <p:nvSpPr>
+          <p:cNvPr id="41" name="Oval 40">
+            <a:extLst>
+              <a:ext uri="{FF2B5EF4-FFF2-40B4-BE49-F238E27FC236}">
+                <a16:creationId xmlns:a16="http://schemas.microsoft.com/office/drawing/2014/main" id="{CC5AAEFE-A995-66DC-607A-04A9794A814E}"/>
+              </a:ext>
+            </a:extLst>
+          </p:cNvPr>
+          <p:cNvSpPr/>
+          <p:nvPr/>
+        </p:nvSpPr>
+        <p:spPr>
+          <a:xfrm>
+            <a:off x="8023956" y="4271601"/>
+            <a:ext cx="385591" cy="385591"/>
+          </a:xfrm>
+          <a:prstGeom prst="ellipse">
+            <a:avLst/>
+          </a:prstGeom>
+        </p:spPr>
+        <p:style>
+          <a:lnRef idx="2">
+            <a:schemeClr val="dk1"/>
+          </a:lnRef>
+          <a:fillRef idx="1">
+            <a:schemeClr val="lt1"/>
+          </a:fillRef>
+          <a:effectRef idx="0">
+            <a:schemeClr val="dk1"/>
+          </a:effectRef>
+          <a:fontRef idx="minor">
+            <a:schemeClr val="dk1"/>
+          </a:fontRef>
+        </p:style>
+        <p:txBody>
+          <a:bodyPr rtlCol="0" anchor="ctr"/>
+          <a:lstStyle/>
+          <a:p>
+            <a:pPr algn="ctr"/>
+            <a:r>
+              <a:rPr lang="en-BE" dirty="0"/>
+              <a:t>6</a:t>
+            </a:r>
+          </a:p>
+        </p:txBody>
+      </p:sp>
+      <p:sp>
+        <p:nvSpPr>
+          <p:cNvPr id="43" name="TextBox 42">
+            <a:extLst>
+              <a:ext uri="{FF2B5EF4-FFF2-40B4-BE49-F238E27FC236}">
+                <a16:creationId xmlns:a16="http://schemas.microsoft.com/office/drawing/2014/main" id="{7508DF02-F5B4-3A0E-CB8F-739FC2CDDBCB}"/>
+              </a:ext>
+            </a:extLst>
+          </p:cNvPr>
+          <p:cNvSpPr txBox="1"/>
+          <p:nvPr/>
+        </p:nvSpPr>
+        <p:spPr>
+          <a:xfrm>
+            <a:off x="1155557" y="4271601"/>
+            <a:ext cx="793807" cy="369332"/>
+          </a:xfrm>
+          <a:prstGeom prst="rect">
+            <a:avLst/>
+          </a:prstGeom>
+          <a:noFill/>
+        </p:spPr>
+        <p:txBody>
+          <a:bodyPr wrap="none" rtlCol="0">
+            <a:spAutoFit/>
+          </a:bodyPr>
+          <a:lstStyle/>
+          <a:p>
+            <a:r>
+              <a:rPr lang="en-BE" b="1" dirty="0">
+                <a:solidFill>
+                  <a:schemeClr val="accent1"/>
+                </a:solidFill>
+              </a:rPr>
+              <a:t>b</a:t>
+            </a:r>
+            <a:r>
+              <a:rPr lang="en-BE" dirty="0">
+                <a:solidFill>
+                  <a:schemeClr val="accent1"/>
+                </a:solidFill>
+              </a:rPr>
+              <a:t>lue</a:t>
+            </a:r>
+            <a:r>
+              <a:rPr lang="en-BE" dirty="0"/>
+              <a:t> =</a:t>
+            </a:r>
+          </a:p>
+        </p:txBody>
+      </p:sp>
+      <p:sp>
+        <p:nvSpPr>
+          <p:cNvPr id="44" name="TextBox 43">
+            <a:extLst>
+              <a:ext uri="{FF2B5EF4-FFF2-40B4-BE49-F238E27FC236}">
+                <a16:creationId xmlns:a16="http://schemas.microsoft.com/office/drawing/2014/main" id="{CF12D74F-2532-135C-2375-1AF03DCB36E8}"/>
+              </a:ext>
+            </a:extLst>
+          </p:cNvPr>
+          <p:cNvSpPr txBox="1"/>
+          <p:nvPr/>
+        </p:nvSpPr>
+        <p:spPr>
+          <a:xfrm>
+            <a:off x="3892633" y="4279730"/>
+            <a:ext cx="1033745" cy="369332"/>
+          </a:xfrm>
+          <a:prstGeom prst="rect">
+            <a:avLst/>
+          </a:prstGeom>
+          <a:noFill/>
+        </p:spPr>
+        <p:txBody>
+          <a:bodyPr wrap="none" rtlCol="0">
+            <a:spAutoFit/>
+          </a:bodyPr>
+          <a:lstStyle/>
+          <a:p>
+            <a:r>
+              <a:rPr lang="en-BE" b="1" dirty="0">
+                <a:solidFill>
+                  <a:schemeClr val="accent2"/>
+                </a:solidFill>
+              </a:rPr>
+              <a:t>o</a:t>
+            </a:r>
+            <a:r>
+              <a:rPr lang="en-BE" dirty="0">
+                <a:solidFill>
+                  <a:schemeClr val="accent2"/>
+                </a:solidFill>
+              </a:rPr>
+              <a:t>range</a:t>
+            </a:r>
+            <a:r>
+              <a:rPr lang="en-BE" dirty="0"/>
+              <a:t> =</a:t>
+            </a:r>
+          </a:p>
+        </p:txBody>
+      </p:sp>
+      <p:sp>
+        <p:nvSpPr>
+          <p:cNvPr id="45" name="TextBox 44">
+            <a:extLst>
+              <a:ext uri="{FF2B5EF4-FFF2-40B4-BE49-F238E27FC236}">
+                <a16:creationId xmlns:a16="http://schemas.microsoft.com/office/drawing/2014/main" id="{CEC502AF-CC00-2532-2953-6BBEC961FDD0}"/>
+              </a:ext>
+            </a:extLst>
+          </p:cNvPr>
+          <p:cNvSpPr txBox="1"/>
+          <p:nvPr/>
+        </p:nvSpPr>
+        <p:spPr>
+          <a:xfrm>
+            <a:off x="7080094" y="4287859"/>
+            <a:ext cx="910890" cy="369332"/>
+          </a:xfrm>
+          <a:prstGeom prst="rect">
+            <a:avLst/>
+          </a:prstGeom>
+          <a:noFill/>
+        </p:spPr>
+        <p:txBody>
+          <a:bodyPr wrap="none" rtlCol="0">
+            <a:spAutoFit/>
+          </a:bodyPr>
+          <a:lstStyle/>
+          <a:p>
+            <a:r>
+              <a:rPr lang="en-BE" b="1" dirty="0">
+                <a:solidFill>
+                  <a:schemeClr val="accent6"/>
+                </a:solidFill>
+              </a:rPr>
+              <a:t>g</a:t>
+            </a:r>
+            <a:r>
+              <a:rPr lang="en-BE" dirty="0">
+                <a:solidFill>
+                  <a:schemeClr val="accent6"/>
+                </a:solidFill>
+              </a:rPr>
+              <a:t>reen</a:t>
+            </a:r>
+            <a:r>
+              <a:rPr lang="en-BE" dirty="0"/>
+              <a:t> =</a:t>
+            </a:r>
+          </a:p>
+        </p:txBody>
+      </p:sp>
+      <p:sp>
+        <p:nvSpPr>
+          <p:cNvPr id="50" name="TextBox 49">
+            <a:extLst>
+              <a:ext uri="{FF2B5EF4-FFF2-40B4-BE49-F238E27FC236}">
+                <a16:creationId xmlns:a16="http://schemas.microsoft.com/office/drawing/2014/main" id="{069C2611-5025-57F3-2AC7-9B4C4B478C34}"/>
+              </a:ext>
+            </a:extLst>
+          </p:cNvPr>
+          <p:cNvSpPr txBox="1"/>
+          <p:nvPr/>
+        </p:nvSpPr>
+        <p:spPr>
+          <a:xfrm>
+            <a:off x="5622281" y="1701643"/>
+            <a:ext cx="2111988" cy="646331"/>
+          </a:xfrm>
+          <a:prstGeom prst="rect">
+            <a:avLst/>
+          </a:prstGeom>
+          <a:noFill/>
+        </p:spPr>
+        <p:txBody>
+          <a:bodyPr wrap="none" rtlCol="0">
+            <a:spAutoFit/>
+          </a:bodyPr>
+          <a:lstStyle/>
+          <a:p>
+            <a:r>
+              <a:rPr lang="en-BE" i="1" dirty="0"/>
+              <a:t>groeperen per kleur</a:t>
+            </a:r>
+          </a:p>
+          <a:p>
+            <a:r>
+              <a:rPr lang="en-BE" b="1" i="1" dirty="0"/>
+              <a:t>(classifier)</a:t>
+            </a:r>
+          </a:p>
+        </p:txBody>
+      </p:sp>
+      <p:sp>
+        <p:nvSpPr>
+          <p:cNvPr id="51" name="TextBox 50">
+            <a:extLst>
+              <a:ext uri="{FF2B5EF4-FFF2-40B4-BE49-F238E27FC236}">
+                <a16:creationId xmlns:a16="http://schemas.microsoft.com/office/drawing/2014/main" id="{3128703A-9AE2-7A72-7C9A-8F546AA09708}"/>
+              </a:ext>
+            </a:extLst>
+          </p:cNvPr>
+          <p:cNvSpPr txBox="1"/>
+          <p:nvPr/>
+        </p:nvSpPr>
+        <p:spPr>
+          <a:xfrm>
+            <a:off x="8594996" y="3439360"/>
+            <a:ext cx="2639762" cy="646331"/>
+          </a:xfrm>
+          <a:prstGeom prst="rect">
+            <a:avLst/>
+          </a:prstGeom>
+          <a:noFill/>
+        </p:spPr>
+        <p:txBody>
+          <a:bodyPr wrap="none" rtlCol="0">
+            <a:spAutoFit/>
+          </a:bodyPr>
+          <a:lstStyle/>
+          <a:p>
+            <a:r>
+              <a:rPr lang="en-BE" i="1" dirty="0"/>
+              <a:t>tellen per kleur</a:t>
+            </a:r>
+            <a:br>
+              <a:rPr lang="en-BE" i="1" dirty="0"/>
+            </a:br>
+            <a:r>
+              <a:rPr lang="en-BE" b="1" i="1" dirty="0"/>
+              <a:t>(downstream collector)</a:t>
+            </a:r>
+          </a:p>
+        </p:txBody>
+      </p:sp>
+    </p:spTree>
+    <p:extLst>
+      <p:ext uri="{BB962C8B-B14F-4D97-AF65-F5344CB8AC3E}">
+        <p14:creationId xmlns:p14="http://schemas.microsoft.com/office/powerpoint/2010/main" val="1313382601"/>
       </p:ext>
     </p:extLst>
   </p:cSld>
